--- a/curso_es/pptx/S22.pptx
+++ b/curso_es/pptx/S22.pptx
@@ -3800,7 +3800,7 @@
                 </a:solidFill>
                 <a:latin typeface="Nunito Sans"/>
               </a:rPr>
-              <a:t>Noticia inventada: «Los alumnos que desayunan en casa sacan mejores notas». Iker concluye: «El desayuno te hace más listo».</a:t>
+              <a:t>Noticia inventada: «Los alumnos que desayunan en casa sacan mejores notas». Un chico concluye: «El desayuno te hace más listo».</a:t>
             </a:r>
           </a:p>
         </p:txBody>
@@ -4109,7 +4109,7 @@
                 </a:solidFill>
                 <a:latin typeface="Nunito Sans"/>
               </a:rPr>
-              <a:t>Maialen deja las bebidas energéticas por la tarde y durante tres semanas se duerme antes. Vuelve a tomarlas y vuelve a dormir mal.</a:t>
+              <a:t>Una chica deja las bebidas energéticas por la tarde y durante tres semanas se duerme antes. Vuelve a tomarlas y vuelve a dormir mal.</a:t>
             </a:r>
           </a:p>
         </p:txBody>
@@ -4751,7 +4751,7 @@
                 </a:solidFill>
                 <a:latin typeface="Nunito Sans"/>
               </a:rPr>
-              <a:t>Chen come gambas por primera vez. A los diez minutos se le hinchan los labios y le pica la piel. Su madre: «Han sido las gambas».</a:t>
+              <a:t>Un chico come gambas por primera vez. A los diez minutos se le hinchan los labios y le pica la piel. Su madre: «Han sido las gambas».</a:t>
             </a:r>
           </a:p>
         </p:txBody>
